--- a/Presentation PBL-I AIFT.pptx
+++ b/Presentation PBL-I AIFT.pptx
@@ -326,7 +326,7 @@
             <a:fld id="{1D5BB0C6-8FC1-47C0-B737-D54E21B5B868}" type="datetimeFigureOut">
               <a:rPr lang="en-US" smtClean="0"/>
               <a:pPr/>
-              <a:t>5/18/2026</a:t>
+              <a:t>5/19/2026</a:t>
             </a:fld>
             <a:endParaRPr lang="en-US"/>
           </a:p>
@@ -743,7 +743,7 @@
             <a:fld id="{1D5BB0C6-8FC1-47C0-B737-D54E21B5B868}" type="datetimeFigureOut">
               <a:rPr lang="en-US" smtClean="0"/>
               <a:pPr/>
-              <a:t>5/18/2026</a:t>
+              <a:t>5/19/2026</a:t>
             </a:fld>
             <a:endParaRPr lang="en-US"/>
           </a:p>
@@ -846,7 +846,7 @@
             <a:fld id="{1D5BB0C6-8FC1-47C0-B737-D54E21B5B868}" type="datetimeFigureOut">
               <a:rPr lang="en-US" smtClean="0"/>
               <a:pPr/>
-              <a:t>5/18/2026</a:t>
+              <a:t>5/19/2026</a:t>
             </a:fld>
             <a:endParaRPr lang="en-US"/>
           </a:p>
@@ -1083,7 +1083,7 @@
             <a:fld id="{1D5BB0C6-8FC1-47C0-B737-D54E21B5B868}" type="datetimeFigureOut">
               <a:rPr lang="en-US" smtClean="0"/>
               <a:pPr/>
-              <a:t>5/18/2026</a:t>
+              <a:t>5/19/2026</a:t>
             </a:fld>
             <a:endParaRPr lang="en-US"/>
           </a:p>
@@ -1949,44 +1949,6 @@
       </p:sp>
       <p:sp>
         <p:nvSpPr>
-          <p:cNvPr id="5" name="TextBox 4"/>
-          <p:cNvSpPr txBox="1"/>
-          <p:nvPr/>
-        </p:nvSpPr>
-        <p:spPr>
-          <a:xfrm>
-            <a:off x="3275856" y="4653136"/>
-            <a:ext cx="255198" cy="954107"/>
-          </a:xfrm>
-          <a:prstGeom prst="rect">
-            <a:avLst/>
-          </a:prstGeom>
-          <a:noFill/>
-        </p:spPr>
-        <p:txBody>
-          <a:bodyPr wrap="none" rtlCol="0">
-            <a:spAutoFit/>
-          </a:bodyPr>
-          <a:lstStyle/>
-          <a:p>
-            <a:r>
-              <a:rPr lang="en-US" sz="2000" dirty="0">
-                <a:latin typeface="Times New Roman" pitchFamily="18" charset="0"/>
-                <a:cs typeface="Times New Roman" pitchFamily="18" charset="0"/>
-              </a:rPr>
-              <a:t>:</a:t>
-            </a:r>
-          </a:p>
-          <a:p>
-            <a:endParaRPr lang="en-US" dirty="0"/>
-          </a:p>
-          <a:p>
-            <a:endParaRPr lang="en-US" dirty="0"/>
-          </a:p>
-        </p:txBody>
-      </p:sp>
-      <p:sp>
-        <p:nvSpPr>
           <p:cNvPr id="6" name="TextBox 5">
             <a:extLst>
               <a:ext uri="{FF2B5EF4-FFF2-40B4-BE49-F238E27FC236}">
@@ -2020,17 +1982,28 @@
           <a:p>
             <a:r>
               <a:rPr lang="en-US" sz="2000" dirty="0"/>
-              <a:t>Team Details:</a:t>
-            </a:r>
-          </a:p>
-          <a:p>
-            <a:endParaRPr lang="en-US" sz="2000" dirty="0"/>
-          </a:p>
-          <a:p>
-            <a:endParaRPr lang="en-US" sz="2000" dirty="0"/>
-          </a:p>
-          <a:p>
-            <a:endParaRPr lang="en-US" sz="2000" dirty="0"/>
+              <a:t>Team Details: </a:t>
+            </a:r>
+          </a:p>
+          <a:p>
+            <a:r>
+              <a:rPr lang="en-US" sz="2000" dirty="0"/>
+              <a:t>Team Name : </a:t>
+            </a:r>
+            <a:r>
+              <a:rPr lang="en-US" sz="2000" dirty="0" err="1"/>
+              <a:t>SmartHire</a:t>
+            </a:r>
+            <a:r>
+              <a:rPr lang="en-US" sz="2000" dirty="0"/>
+              <a:t> </a:t>
+            </a:r>
+          </a:p>
+          <a:p>
+            <a:r>
+              <a:rPr lang="en-US" sz="2000" dirty="0"/>
+              <a:t>Team Member : Moksh Kulshrestha (2410998600)</a:t>
+            </a:r>
           </a:p>
           <a:p>
             <a:endParaRPr lang="en-US" dirty="0">
@@ -2045,7 +2018,7 @@
                 <a:latin typeface="Times New Roman" pitchFamily="18" charset="0"/>
                 <a:cs typeface="Times New Roman" pitchFamily="18" charset="0"/>
               </a:rPr>
-              <a:t>Faculty Coordinator:</a:t>
+              <a:t>Faculty Coordinator: Dr. Neeraj Julka</a:t>
             </a:r>
             <a:endParaRPr lang="en-US" dirty="0">
               <a:solidFill>
@@ -2070,7 +2043,7 @@
         </p:nvSpPr>
         <p:spPr>
           <a:xfrm>
-            <a:off x="1187624" y="5661248"/>
+            <a:off x="1098452" y="5157192"/>
             <a:ext cx="6947095" cy="707886"/>
           </a:xfrm>
           <a:prstGeom prst="rect">
@@ -2130,6 +2103,42 @@
           </a:p>
         </p:txBody>
       </p:sp>
+      <p:pic>
+        <p:nvPicPr>
+          <p:cNvPr id="8" name="Picture 7">
+            <a:extLst>
+              <a:ext uri="{FF2B5EF4-FFF2-40B4-BE49-F238E27FC236}">
+                <a16:creationId xmlns:a16="http://schemas.microsoft.com/office/drawing/2014/main" id="{28919F99-DC37-2698-6992-F09100CD7264}"/>
+              </a:ext>
+            </a:extLst>
+          </p:cNvPr>
+          <p:cNvPicPr>
+            <a:picLocks noChangeAspect="1"/>
+          </p:cNvPicPr>
+          <p:nvPr/>
+        </p:nvPicPr>
+        <p:blipFill>
+          <a:blip r:embed="rId2" cstate="print">
+            <a:extLst>
+              <a:ext uri="{28A0092B-C50C-407E-A947-70E740481C1C}">
+                <a14:useLocalDpi xmlns:a14="http://schemas.microsoft.com/office/drawing/2010/main" val="0"/>
+              </a:ext>
+            </a:extLst>
+          </a:blip>
+          <a:stretch>
+            <a:fillRect/>
+          </a:stretch>
+        </p:blipFill>
+        <p:spPr>
+          <a:xfrm>
+            <a:off x="35496" y="-99392"/>
+            <a:ext cx="1008112" cy="1008112"/>
+          </a:xfrm>
+          <a:prstGeom prst="rect">
+            <a:avLst/>
+          </a:prstGeom>
+        </p:spPr>
+      </p:pic>
     </p:spTree>
   </p:cSld>
   <p:clrMapOvr>
